--- a/documents/3.7 병동 간담회 진료지원간호팀 2026 QI.pptx
+++ b/documents/3.7 병동 간담회 진료지원간호팀 2026 QI.pptx
@@ -891,6 +891,53 @@
           </a:p>
         </p:txBody>
       </p:sp>
+      <p:pic>
+        <p:nvPicPr>
+          <p:cNvPr id="7" name="_x189390376" descr="EMB000038242a1a">
+            <a:extLst>
+              <a:ext uri="{FF2B5EF4-FFF2-40B4-BE49-F238E27FC236}">
+                <a16:creationId xmlns:a16="http://schemas.microsoft.com/office/drawing/2014/main" id="{A0A0659D-0D17-3ECD-5DAD-5C88B84A5B52}"/>
+              </a:ext>
+            </a:extLst>
+          </p:cNvPr>
+          <p:cNvPicPr>
+            <a:picLocks noChangeAspect="1" noChangeArrowheads="1"/>
+          </p:cNvPicPr>
+          <p:nvPr userDrawn="1"/>
+        </p:nvPicPr>
+        <p:blipFill>
+          <a:blip r:embed="rId2" cstate="print">
+            <a:extLst>
+              <a:ext uri="{28A0092B-C50C-407E-A947-70E740481C1C}">
+                <a14:useLocalDpi xmlns:a14="http://schemas.microsoft.com/office/drawing/2010/main" val="0"/>
+              </a:ext>
+            </a:extLst>
+          </a:blip>
+          <a:srcRect/>
+          <a:stretch>
+            <a:fillRect/>
+          </a:stretch>
+        </p:blipFill>
+        <p:spPr bwMode="auto">
+          <a:xfrm>
+            <a:off x="497772" y="408424"/>
+            <a:ext cx="1912990" cy="1144300"/>
+          </a:xfrm>
+          <a:prstGeom prst="rect">
+            <a:avLst/>
+          </a:prstGeom>
+          <a:noFill/>
+          <a:extLst>
+            <a:ext uri="{909E8E84-426E-40DD-AFC4-6F175D3DCCD1}">
+              <a14:hiddenFill xmlns:a14="http://schemas.microsoft.com/office/drawing/2010/main">
+                <a:solidFill>
+                  <a:srgbClr val="FFFFFF"/>
+                </a:solidFill>
+              </a14:hiddenFill>
+            </a:ext>
+          </a:extLst>
+        </p:spPr>
+      </p:pic>
     </p:spTree>
     <p:extLst>
       <p:ext uri="{BB962C8B-B14F-4D97-AF65-F5344CB8AC3E}">
@@ -2567,35 +2614,56 @@
         </p:nvSpPr>
         <p:spPr>
           <a:xfrm>
-            <a:off x="1524000" y="3602038"/>
-            <a:ext cx="9144000" cy="959329"/>
+            <a:off x="2109973" y="3602038"/>
+            <a:ext cx="7972054" cy="2139881"/>
           </a:xfrm>
         </p:spPr>
         <p:txBody>
-          <a:bodyPr/>
+          <a:bodyPr wrap="none">
+            <a:spAutoFit/>
+          </a:bodyPr>
           <a:lstStyle/>
           <a:p>
             <a:r>
-              <a:rPr lang="ko-KR" altLang="en-US" b="1" dirty="0">
+              <a:rPr lang="ko-KR" altLang="en-US" sz="3600" b="1" dirty="0">
                 <a:latin typeface="KoPub돋움체 Light" panose="02020603020101020101" pitchFamily="18" charset="-127"/>
                 <a:ea typeface="KoPub돋움체 Light" panose="02020603020101020101" pitchFamily="18" charset="-127"/>
               </a:rPr>
               <a:t>이보다 더 좋을 순 없다</a:t>
             </a:r>
             <a:r>
-              <a:rPr lang="en-US" altLang="ko-KR" b="1" dirty="0">
+              <a:rPr lang="en-US" altLang="ko-KR" sz="3600" b="1" dirty="0">
                 <a:latin typeface="KoPub돋움체 Light" panose="02020603020101020101" pitchFamily="18" charset="-127"/>
                 <a:ea typeface="KoPub돋움체 Light" panose="02020603020101020101" pitchFamily="18" charset="-127"/>
               </a:rPr>
               <a:t>! </a:t>
             </a:r>
             <a:r>
-              <a:rPr lang="ko-KR" altLang="en-US" b="1" dirty="0">
+              <a:rPr lang="ko-KR" altLang="en-US" sz="3600" b="1" dirty="0">
                 <a:latin typeface="KoPub돋움체 Light" panose="02020603020101020101" pitchFamily="18" charset="-127"/>
                 <a:ea typeface="KoPub돋움체 Light" panose="02020603020101020101" pitchFamily="18" charset="-127"/>
               </a:rPr>
               <a:t>협업기반 간호 현장</a:t>
             </a:r>
+            <a:endParaRPr lang="en-US" altLang="ko-KR" sz="3600" b="1" dirty="0">
+              <a:latin typeface="KoPub돋움체 Light" panose="02020603020101020101" pitchFamily="18" charset="-127"/>
+              <a:ea typeface="KoPub돋움체 Light" panose="02020603020101020101" pitchFamily="18" charset="-127"/>
+            </a:endParaRPr>
+          </a:p>
+          <a:p>
+            <a:r>
+              <a:rPr lang="ko-KR" altLang="en-US" sz="3600" b="1" dirty="0">
+                <a:latin typeface="KoPub돋움체 Light" panose="02020603020101020101" pitchFamily="18" charset="-127"/>
+                <a:ea typeface="KoPub돋움체 Light" panose="02020603020101020101" pitchFamily="18" charset="-127"/>
+              </a:rPr>
+              <a:t>협업 시스템 간담회</a:t>
+            </a:r>
+            <a:endParaRPr lang="en-US" altLang="ko-KR" sz="3600" b="1" dirty="0">
+              <a:latin typeface="KoPub돋움체 Light" panose="02020603020101020101" pitchFamily="18" charset="-127"/>
+              <a:ea typeface="KoPub돋움체 Light" panose="02020603020101020101" pitchFamily="18" charset="-127"/>
+            </a:endParaRPr>
+          </a:p>
+          <a:p>
             <a:endParaRPr lang="en-US" altLang="ko-KR" b="1" dirty="0">
               <a:latin typeface="KoPub돋움체 Light" panose="02020603020101020101" pitchFamily="18" charset="-127"/>
               <a:ea typeface="KoPub돋움체 Light" panose="02020603020101020101" pitchFamily="18" charset="-127"/>
@@ -2603,51 +2671,29 @@
           </a:p>
           <a:p>
             <a:r>
-              <a:rPr lang="ko-KR" altLang="en-US" dirty="0">
-                <a:latin typeface="KoPub돋움체 Light" panose="02020603020101020101" pitchFamily="18" charset="-127"/>
-                <a:ea typeface="KoPub돋움체 Light" panose="02020603020101020101" pitchFamily="18" charset="-127"/>
-              </a:rPr>
-              <a:t>협업 시스템 간담회</a:t>
+              <a:rPr lang="ko-KR" altLang="en-US" b="1" dirty="0">
+                <a:latin typeface="KoPub돋움체 Light" panose="02020603020101020101" pitchFamily="18" charset="-127"/>
+                <a:ea typeface="KoPub돋움체 Light" panose="02020603020101020101" pitchFamily="18" charset="-127"/>
+              </a:rPr>
+              <a:t>발표자 </a:t>
+            </a:r>
+            <a:r>
+              <a:rPr lang="en-US" altLang="ko-KR" b="1" dirty="0">
+                <a:latin typeface="KoPub돋움체 Light" panose="02020603020101020101" pitchFamily="18" charset="-127"/>
+                <a:ea typeface="KoPub돋움체 Light" panose="02020603020101020101" pitchFamily="18" charset="-127"/>
+              </a:rPr>
+              <a:t>: </a:t>
+            </a:r>
+            <a:r>
+              <a:rPr lang="ko-KR" altLang="en-US" b="1" dirty="0">
+                <a:latin typeface="KoPub돋움체 Light" panose="02020603020101020101" pitchFamily="18" charset="-127"/>
+                <a:ea typeface="KoPub돋움체 Light" panose="02020603020101020101" pitchFamily="18" charset="-127"/>
+              </a:rPr>
+              <a:t>이미자</a:t>
             </a:r>
           </a:p>
         </p:txBody>
       </p:sp>
-      <p:cxnSp>
-        <p:nvCxnSpPr>
-          <p:cNvPr id="5" name="직선 연결선 4">
-            <a:extLst>
-              <a:ext uri="{FF2B5EF4-FFF2-40B4-BE49-F238E27FC236}">
-                <a16:creationId xmlns:a16="http://schemas.microsoft.com/office/drawing/2014/main" id="{D34ADC97-FBE3-B49F-2F37-CB487B0CFABF}"/>
-              </a:ext>
-            </a:extLst>
-          </p:cNvPr>
-          <p:cNvCxnSpPr/>
-          <p:nvPr/>
-        </p:nvCxnSpPr>
-        <p:spPr>
-          <a:xfrm>
-            <a:off x="1384300" y="3500438"/>
-            <a:ext cx="9461500" cy="0"/>
-          </a:xfrm>
-          <a:prstGeom prst="line">
-            <a:avLst/>
-          </a:prstGeom>
-        </p:spPr>
-        <p:style>
-          <a:lnRef idx="1">
-            <a:schemeClr val="accent1"/>
-          </a:lnRef>
-          <a:fillRef idx="0">
-            <a:schemeClr val="accent1"/>
-          </a:fillRef>
-          <a:effectRef idx="0">
-            <a:schemeClr val="accent1"/>
-          </a:effectRef>
-          <a:fontRef idx="minor">
-            <a:schemeClr val="tx1"/>
-          </a:fontRef>
-        </p:style>
-      </p:cxnSp>
     </p:spTree>
     <p:extLst>
       <p:ext uri="{BB962C8B-B14F-4D97-AF65-F5344CB8AC3E}">

--- a/documents/3.7 병동 간담회 진료지원간호팀 2026 QI.pptx
+++ b/documents/3.7 병동 간담회 진료지원간호팀 2026 QI.pptx
@@ -2689,7 +2689,7 @@
                 <a:latin typeface="KoPub돋움체 Light" panose="02020603020101020101" pitchFamily="18" charset="-127"/>
                 <a:ea typeface="KoPub돋움체 Light" panose="02020603020101020101" pitchFamily="18" charset="-127"/>
               </a:rPr>
-              <a:t>이미자</a:t>
+              <a:t>진료지원간호팀 이비인후과 이미자</a:t>
             </a:r>
           </a:p>
         </p:txBody>
@@ -3301,7 +3301,7 @@
         <p:spPr>
           <a:xfrm>
             <a:off x="1097280" y="4119394"/>
-            <a:ext cx="7119257" cy="1938992"/>
+            <a:ext cx="7074373" cy="1938992"/>
           </a:xfrm>
           <a:prstGeom prst="rect">
             <a:avLst/>
@@ -3360,7 +3360,7 @@
                 <a:ea typeface="KoPub돋움체 Light" panose="02020603020101020101" pitchFamily="18" charset="-127"/>
                 <a:cs typeface="Malgun Gothic" pitchFamily="34" charset="-120"/>
               </a:rPr>
-              <a:t>박재홍</a:t>
+              <a:t>박</a:t>
             </a:r>
             <a:r>
               <a:rPr lang="en-US" altLang="ko-KR" sz="1500" dirty="0">
@@ -3371,7 +3371,7 @@
                 <a:ea typeface="KoPub돋움체 Light" panose="02020603020101020101" pitchFamily="18" charset="-127"/>
                 <a:cs typeface="Malgun Gothic" pitchFamily="34" charset="-120"/>
               </a:rPr>
-              <a:t>]-[0308]-[1911] / </a:t>
+              <a:t>OO]-[0308]-[1911] / </a:t>
             </a:r>
             <a:r>
               <a:rPr lang="ko-KR" altLang="en-US" sz="1500" dirty="0">
@@ -3385,62 +3385,7 @@
                 <a:ea typeface="KoPub돋움체 Light" panose="02020603020101020101" pitchFamily="18" charset="-127"/>
                 <a:cs typeface="Malgun Gothic" pitchFamily="34" charset="-120"/>
               </a:rPr>
-              <a:t>신환</a:t>
-            </a:r>
-            <a:r>
-              <a:rPr lang="ko-KR" altLang="en-US" sz="1500" dirty="0">
-                <a:solidFill>
-                  <a:srgbClr val="0F172A"/>
-                </a:solidFill>
-                <a:latin typeface="KoPub돋움체 Light" panose="02020603020101020101" pitchFamily="18" charset="-127"/>
-                <a:ea typeface="KoPub돋움체 Light" panose="02020603020101020101" pitchFamily="18" charset="-127"/>
-                <a:cs typeface="Malgun Gothic" pitchFamily="34" charset="-120"/>
-              </a:rPr>
-              <a:t> </a:t>
-            </a:r>
-            <a:r>
-              <a:rPr lang="en-US" altLang="ko-KR" sz="1500" dirty="0">
-                <a:solidFill>
-                  <a:srgbClr val="0F172A"/>
-                </a:solidFill>
-                <a:latin typeface="KoPub돋움체 Light" panose="02020603020101020101" pitchFamily="18" charset="-127"/>
-                <a:ea typeface="KoPub돋움체 Light" panose="02020603020101020101" pitchFamily="18" charset="-127"/>
-                <a:cs typeface="Malgun Gothic" pitchFamily="34" charset="-120"/>
-              </a:rPr>
-              <a:t>/ </a:t>
-            </a:r>
-            <a:r>
-              <a:rPr lang="ko-KR" altLang="en-US" sz="1500" dirty="0">
-                <a:solidFill>
-                  <a:srgbClr val="0F172A"/>
-                </a:solidFill>
-                <a:latin typeface="KoPub돋움체 Light" panose="02020603020101020101" pitchFamily="18" charset="-127"/>
-                <a:ea typeface="KoPub돋움체 Light" panose="02020603020101020101" pitchFamily="18" charset="-127"/>
-                <a:cs typeface="Malgun Gothic" pitchFamily="34" charset="-120"/>
-              </a:rPr>
-              <a:t>근거</a:t>
-            </a:r>
-            <a:r>
-              <a:rPr lang="en-US" altLang="ko-KR" sz="1500" dirty="0">
-                <a:solidFill>
-                  <a:srgbClr val="0F172A"/>
-                </a:solidFill>
-                <a:latin typeface="KoPub돋움체 Light" panose="02020603020101020101" pitchFamily="18" charset="-127"/>
-                <a:ea typeface="KoPub돋움체 Light" panose="02020603020101020101" pitchFamily="18" charset="-127"/>
-                <a:cs typeface="Malgun Gothic" pitchFamily="34" charset="-120"/>
-              </a:rPr>
-              <a:t>:</a:t>
-            </a:r>
-            <a:r>
-              <a:rPr lang="ko-KR" altLang="en-US" sz="1500" dirty="0">
-                <a:solidFill>
-                  <a:srgbClr val="0F172A"/>
-                </a:solidFill>
-                <a:latin typeface="KoPub돋움체 Light" panose="02020603020101020101" pitchFamily="18" charset="-127"/>
-                <a:ea typeface="KoPub돋움체 Light" panose="02020603020101020101" pitchFamily="18" charset="-127"/>
-                <a:cs typeface="Malgun Gothic" pitchFamily="34" charset="-120"/>
-              </a:rPr>
-              <a:t>입원 </a:t>
+              <a:t>신환 입원 완료 </a:t>
             </a:r>
             <a:r>
               <a:rPr lang="en-US" altLang="ko-KR" sz="1500" dirty="0">
@@ -3500,7 +3445,7 @@
                 <a:ea typeface="KoPub돋움체 Light" panose="02020603020101020101" pitchFamily="18" charset="-127"/>
                 <a:cs typeface="Malgun Gothic" pitchFamily="34" charset="-120"/>
               </a:rPr>
-              <a:t>박재홍</a:t>
+              <a:t>박</a:t>
             </a:r>
             <a:r>
               <a:rPr lang="en-US" altLang="ko-KR" sz="1500" dirty="0">
@@ -3511,7 +3456,7 @@
                 <a:ea typeface="KoPub돋움체 Light" panose="02020603020101020101" pitchFamily="18" charset="-127"/>
                 <a:cs typeface="Malgun Gothic" pitchFamily="34" charset="-120"/>
               </a:rPr>
-              <a:t>]-[0308]-[1921] / </a:t>
+              <a:t>OO]-[0308]-[1921] / </a:t>
             </a:r>
             <a:r>
               <a:rPr lang="ko-KR" altLang="en-US" sz="1500" dirty="0">
@@ -3588,7 +3533,7 @@
                 <a:ea typeface="KoPub돋움체 Light" panose="02020603020101020101" pitchFamily="18" charset="-127"/>
                 <a:cs typeface="Malgun Gothic" pitchFamily="34" charset="-120"/>
               </a:rPr>
-              <a:t>박재홍</a:t>
+              <a:t>박</a:t>
             </a:r>
             <a:r>
               <a:rPr lang="en-US" altLang="ko-KR" sz="1500" dirty="0">
@@ -3599,7 +3544,7 @@
                 <a:ea typeface="KoPub돋움체 Light" panose="02020603020101020101" pitchFamily="18" charset="-127"/>
                 <a:cs typeface="Malgun Gothic" pitchFamily="34" charset="-120"/>
               </a:rPr>
-              <a:t>]-[0308]-[1918] / </a:t>
+              <a:t>OO]-[0308]-[1918] / </a:t>
             </a:r>
             <a:r>
               <a:rPr lang="en-US" altLang="ko-KR" sz="1500" dirty="0">
@@ -3613,7 +3558,7 @@
                 <a:ea typeface="KoPub돋움체 Light" panose="02020603020101020101" pitchFamily="18" charset="-127"/>
                 <a:cs typeface="Malgun Gothic" pitchFamily="34" charset="-120"/>
               </a:rPr>
-              <a:t>MRI</a:t>
+              <a:t>MRI </a:t>
             </a:r>
             <a:r>
               <a:rPr lang="ko-KR" altLang="en-US" sz="1500" dirty="0">
@@ -3627,7 +3572,7 @@
                 <a:ea typeface="KoPub돋움체 Light" panose="02020603020101020101" pitchFamily="18" charset="-127"/>
                 <a:cs typeface="Malgun Gothic" pitchFamily="34" charset="-120"/>
               </a:rPr>
-              <a:t>검사준비완료</a:t>
+              <a:t>검사준비 완료</a:t>
             </a:r>
             <a:r>
               <a:rPr lang="ko-KR" altLang="en-US" sz="1500" dirty="0">
@@ -3703,7 +3648,7 @@
                 <a:ea typeface="KoPub돋움체 Light" panose="02020603020101020101" pitchFamily="18" charset="-127"/>
                 <a:cs typeface="Malgun Gothic" pitchFamily="34" charset="-120"/>
               </a:rPr>
-              <a:t>박재홍</a:t>
+              <a:t>박</a:t>
             </a:r>
             <a:r>
               <a:rPr lang="en-US" altLang="ko-KR" sz="1500" dirty="0">
@@ -3714,7 +3659,7 @@
                 <a:ea typeface="KoPub돋움체 Light" panose="02020603020101020101" pitchFamily="18" charset="-127"/>
                 <a:cs typeface="Malgun Gothic" pitchFamily="34" charset="-120"/>
               </a:rPr>
-              <a:t>]-[0308]-[1928] / </a:t>
+              <a:t>OO]-[0308]-[1928] / </a:t>
             </a:r>
             <a:r>
               <a:rPr lang="ko-KR" altLang="en-US" sz="1500" dirty="0">
@@ -3797,7 +3742,7 @@
                 <a:ea typeface="KoPub돋움체 Light" panose="02020603020101020101" pitchFamily="18" charset="-127"/>
                 <a:cs typeface="Malgun Gothic" pitchFamily="34" charset="-120"/>
               </a:rPr>
-              <a:t>박재홍</a:t>
+              <a:t>박</a:t>
             </a:r>
             <a:r>
               <a:rPr lang="en-US" altLang="ko-KR" sz="1500" dirty="0">
@@ -3808,7 +3753,7 @@
                 <a:ea typeface="KoPub돋움체 Light" panose="02020603020101020101" pitchFamily="18" charset="-127"/>
                 <a:cs typeface="Malgun Gothic" pitchFamily="34" charset="-120"/>
               </a:rPr>
-              <a:t>]-[0308]-[1922] / </a:t>
+              <a:t>OO]-[0308]-[1922] / </a:t>
             </a:r>
             <a:r>
               <a:rPr lang="ko-KR" altLang="en-US" sz="1500" dirty="0" err="1">
@@ -3829,28 +3774,6 @@
                 <a:solidFill>
                   <a:srgbClr val="0F172A"/>
                 </a:solidFill>
-                <a:latin typeface="KoPub돋움체 Light" panose="02020603020101020101" pitchFamily="18" charset="-127"/>
-                <a:ea typeface="KoPub돋움체 Light" panose="02020603020101020101" pitchFamily="18" charset="-127"/>
-                <a:cs typeface="Malgun Gothic" pitchFamily="34" charset="-120"/>
-              </a:rPr>
-              <a:t> </a:t>
-            </a:r>
-            <a:r>
-              <a:rPr lang="en-US" altLang="ko-KR" sz="1500" dirty="0">
-                <a:solidFill>
-                  <a:srgbClr val="0F172A"/>
-                </a:solidFill>
-                <a:latin typeface="KoPub돋움체 Light" panose="02020603020101020101" pitchFamily="18" charset="-127"/>
-                <a:ea typeface="KoPub돋움체 Light" panose="02020603020101020101" pitchFamily="18" charset="-127"/>
-                <a:cs typeface="Malgun Gothic" pitchFamily="34" charset="-120"/>
-              </a:rPr>
-              <a:t> </a:t>
-            </a:r>
-            <a:r>
-              <a:rPr lang="ko-KR" altLang="en-US" sz="1500" dirty="0">
-                <a:solidFill>
-                  <a:srgbClr val="0F172A"/>
-                </a:solidFill>
                 <a:highlight>
                   <a:srgbClr val="FFFF00"/>
                 </a:highlight>
@@ -3858,7 +3781,7 @@
                 <a:ea typeface="KoPub돋움체 Light" panose="02020603020101020101" pitchFamily="18" charset="-127"/>
                 <a:cs typeface="Malgun Gothic" pitchFamily="34" charset="-120"/>
               </a:rPr>
-              <a:t>사진첨부</a:t>
+              <a:t> 사진첨부</a:t>
             </a:r>
             <a:r>
               <a:rPr lang="ko-KR" altLang="en-US" sz="1500" dirty="0">
@@ -3926,7 +3849,7 @@
                 <a:ea typeface="KoPub돋움체 Light" panose="02020603020101020101" pitchFamily="18" charset="-127"/>
                 <a:cs typeface="Malgun Gothic" pitchFamily="34" charset="-120"/>
               </a:rPr>
-              <a:t>박재홍</a:t>
+              <a:t>박</a:t>
             </a:r>
             <a:r>
               <a:rPr lang="en-US" altLang="ko-KR" sz="1500" dirty="0">
@@ -3937,7 +3860,7 @@
                 <a:ea typeface="KoPub돋움체 Light" panose="02020603020101020101" pitchFamily="18" charset="-127"/>
                 <a:cs typeface="Malgun Gothic" pitchFamily="34" charset="-120"/>
               </a:rPr>
-              <a:t>]-[0308]-[1932] / </a:t>
+              <a:t>OO]-[0308]-[1932] / </a:t>
             </a:r>
             <a:r>
               <a:rPr lang="ko-KR" altLang="en-US" sz="1500" dirty="0">
@@ -7682,7 +7605,7 @@
           <a:p>
             <a:r>
               <a:rPr lang="ko-KR" altLang="en-US" dirty="0"/>
-              <a:t>진료지원팀 책임하에 질문 답변처리</a:t>
+              <a:t>진료지원간호팀 책임하에 질문 답변처리</a:t>
             </a:r>
             <a:endParaRPr lang="en-US" altLang="ko-KR" dirty="0"/>
           </a:p>
@@ -7974,36 +7897,6 @@
           </a:p>
         </p:txBody>
       </p:sp>
-      <p:pic>
-        <p:nvPicPr>
-          <p:cNvPr id="5" name="그림 4">
-            <a:extLst>
-              <a:ext uri="{FF2B5EF4-FFF2-40B4-BE49-F238E27FC236}">
-                <a16:creationId xmlns:a16="http://schemas.microsoft.com/office/drawing/2014/main" id="{EADFEEE3-5E39-F7E9-0F83-54C46FDEAF2F}"/>
-              </a:ext>
-            </a:extLst>
-          </p:cNvPr>
-          <p:cNvPicPr>
-            <a:picLocks noChangeAspect="1"/>
-          </p:cNvPicPr>
-          <p:nvPr/>
-        </p:nvPicPr>
-        <p:blipFill>
-          <a:blip r:embed="rId2"/>
-          <a:stretch>
-            <a:fillRect/>
-          </a:stretch>
-        </p:blipFill>
-        <p:spPr>
-          <a:xfrm>
-            <a:off x="839787" y="2551884"/>
-            <a:ext cx="10612095" cy="3050629"/>
-          </a:xfrm>
-          <a:prstGeom prst="rect">
-            <a:avLst/>
-          </a:prstGeom>
-        </p:spPr>
-      </p:pic>
       <p:sp>
         <p:nvSpPr>
           <p:cNvPr id="7" name="내용 개체 틀 2">
@@ -8476,6 +8369,36 @@
           </a:p>
         </p:txBody>
       </p:sp>
+      <p:pic>
+        <p:nvPicPr>
+          <p:cNvPr id="6" name="그림 5">
+            <a:extLst>
+              <a:ext uri="{FF2B5EF4-FFF2-40B4-BE49-F238E27FC236}">
+                <a16:creationId xmlns:a16="http://schemas.microsoft.com/office/drawing/2014/main" id="{3A0D858D-C1E4-98AC-0F28-DF86E997F4CE}"/>
+              </a:ext>
+            </a:extLst>
+          </p:cNvPr>
+          <p:cNvPicPr>
+            <a:picLocks noChangeAspect="1"/>
+          </p:cNvPicPr>
+          <p:nvPr/>
+        </p:nvPicPr>
+        <p:blipFill>
+          <a:blip r:embed="rId2"/>
+          <a:stretch>
+            <a:fillRect/>
+          </a:stretch>
+        </p:blipFill>
+        <p:spPr>
+          <a:xfrm>
+            <a:off x="838200" y="2536413"/>
+            <a:ext cx="10515600" cy="2640584"/>
+          </a:xfrm>
+          <a:prstGeom prst="rect">
+            <a:avLst/>
+          </a:prstGeom>
+        </p:spPr>
+      </p:pic>
     </p:spTree>
     <p:extLst>
       <p:ext uri="{BB962C8B-B14F-4D97-AF65-F5344CB8AC3E}">
@@ -9996,14 +9919,14 @@
                 <a:latin typeface="KoPub돋움체 Light" panose="02020603020101020101" pitchFamily="18" charset="-127"/>
                 <a:ea typeface="KoPub돋움체 Light" panose="02020603020101020101" pitchFamily="18" charset="-127"/>
               </a:rPr>
-              <a:t>이상철</a:t>
+              <a:t>이</a:t>
             </a:r>
             <a:r>
               <a:rPr lang="en-US" altLang="ko-KR" sz="1800" dirty="0">
                 <a:latin typeface="KoPub돋움체 Light" panose="02020603020101020101" pitchFamily="18" charset="-127"/>
                 <a:ea typeface="KoPub돋움체 Light" panose="02020603020101020101" pitchFamily="18" charset="-127"/>
               </a:rPr>
-              <a:t>-0306-1540 / </a:t>
+              <a:t>OO-0306-1540 / </a:t>
             </a:r>
             <a:r>
               <a:rPr lang="ko-KR" altLang="en-US" sz="1800" dirty="0">
@@ -10165,14 +10088,14 @@
                 <a:latin typeface="KoPub돋움체 Light" panose="02020603020101020101" pitchFamily="18" charset="-127"/>
                 <a:ea typeface="KoPub돋움체 Light" panose="02020603020101020101" pitchFamily="18" charset="-127"/>
               </a:rPr>
-              <a:t>박재홍</a:t>
+              <a:t>박</a:t>
             </a:r>
             <a:r>
               <a:rPr lang="en-US" altLang="ko-KR" sz="1800" dirty="0">
                 <a:latin typeface="KoPub돋움체 Light" panose="02020603020101020101" pitchFamily="18" charset="-127"/>
                 <a:ea typeface="KoPub돋움체 Light" panose="02020603020101020101" pitchFamily="18" charset="-127"/>
               </a:rPr>
-              <a:t>]-[0308]-[1824] / </a:t>
+              <a:t>OO]-[0308]-[1824] / </a:t>
             </a:r>
             <a:r>
               <a:rPr lang="ko-KR" altLang="en-US" sz="1800" dirty="0">
@@ -10320,14 +10243,14 @@
                 <a:latin typeface="KoPub돋움체 Light" panose="02020603020101020101" pitchFamily="18" charset="-127"/>
                 <a:ea typeface="KoPub돋움체 Light" panose="02020603020101020101" pitchFamily="18" charset="-127"/>
               </a:rPr>
-              <a:t>가나다</a:t>
+              <a:t>가</a:t>
             </a:r>
             <a:r>
               <a:rPr lang="en-US" altLang="ko-KR" sz="1800" dirty="0">
                 <a:latin typeface="KoPub돋움체 Light" panose="02020603020101020101" pitchFamily="18" charset="-127"/>
                 <a:ea typeface="KoPub돋움체 Light" panose="02020603020101020101" pitchFamily="18" charset="-127"/>
               </a:rPr>
-              <a:t>]-[</a:t>
+              <a:t>OO]-[</a:t>
             </a:r>
             <a:r>
               <a:rPr lang="ko-KR" altLang="en-US" sz="1800" dirty="0">
@@ -10475,14 +10398,14 @@
                 <a:latin typeface="KoPub돋움체 Light" panose="02020603020101020101" pitchFamily="18" charset="-127"/>
                 <a:ea typeface="KoPub돋움체 Light" panose="02020603020101020101" pitchFamily="18" charset="-127"/>
               </a:rPr>
-              <a:t>박재홍</a:t>
+              <a:t>박</a:t>
             </a:r>
             <a:r>
               <a:rPr lang="en-US" altLang="ko-KR" sz="1800" dirty="0">
                 <a:latin typeface="KoPub돋움체 Light" panose="02020603020101020101" pitchFamily="18" charset="-127"/>
                 <a:ea typeface="KoPub돋움체 Light" panose="02020603020101020101" pitchFamily="18" charset="-127"/>
               </a:rPr>
-              <a:t>]-[0308]-[1900] / </a:t>
+              <a:t>OO]-[0308]-[1900] / </a:t>
             </a:r>
             <a:r>
               <a:rPr lang="ko-KR" altLang="en-US" sz="1800" dirty="0">
@@ -13162,7 +13085,7 @@
                 <a:latin typeface="KoPub돋움체 Light" panose="02020603020101020101" pitchFamily="18" charset="-127"/>
                 <a:ea typeface="KoPub돋움체 Light" panose="02020603020101020101" pitchFamily="18" charset="-127"/>
               </a:rPr>
-              <a:t>소통 협업 만족도 </a:t>
+              <a:t>협업 소통 만족도 </a:t>
             </a:r>
             <a:r>
               <a:rPr lang="en-US" altLang="ko-KR" sz="2400" kern="0" spc="0" dirty="0">

--- a/documents/3.7 병동 간담회 진료지원간호팀 2026 QI.pptx
+++ b/documents/3.7 병동 간담회 진료지원간호팀 2026 QI.pptx
@@ -9458,36 +9458,6 @@
       </p:pic>
       <p:pic>
         <p:nvPicPr>
-          <p:cNvPr id="8" name="그림 7">
-            <a:extLst>
-              <a:ext uri="{FF2B5EF4-FFF2-40B4-BE49-F238E27FC236}">
-                <a16:creationId xmlns:a16="http://schemas.microsoft.com/office/drawing/2014/main" id="{9ACB5B0F-CD91-D574-2CE7-4CF270C2D77C}"/>
-              </a:ext>
-            </a:extLst>
-          </p:cNvPr>
-          <p:cNvPicPr>
-            <a:picLocks noChangeAspect="1"/>
-          </p:cNvPicPr>
-          <p:nvPr/>
-        </p:nvPicPr>
-        <p:blipFill>
-          <a:blip r:embed="rId3"/>
-          <a:stretch>
-            <a:fillRect/>
-          </a:stretch>
-        </p:blipFill>
-        <p:spPr>
-          <a:xfrm>
-            <a:off x="2299868" y="4276110"/>
-            <a:ext cx="3084058" cy="1734782"/>
-          </a:xfrm>
-          <a:prstGeom prst="rect">
-            <a:avLst/>
-          </a:prstGeom>
-        </p:spPr>
-      </p:pic>
-      <p:pic>
-        <p:nvPicPr>
           <p:cNvPr id="10" name="그림 9">
             <a:extLst>
               <a:ext uri="{FF2B5EF4-FFF2-40B4-BE49-F238E27FC236}">
@@ -9501,7 +9471,7 @@
           <p:nvPr/>
         </p:nvPicPr>
         <p:blipFill>
-          <a:blip r:embed="rId4"/>
+          <a:blip r:embed="rId3"/>
           <a:stretch>
             <a:fillRect/>
           </a:stretch>
@@ -9531,7 +9501,7 @@
           <p:nvPr/>
         </p:nvPicPr>
         <p:blipFill>
-          <a:blip r:embed="rId5"/>
+          <a:blip r:embed="rId4"/>
           <a:stretch>
             <a:fillRect/>
           </a:stretch>
@@ -9760,6 +9730,36 @@
           </a:p>
         </p:txBody>
       </p:sp>
+      <p:pic>
+        <p:nvPicPr>
+          <p:cNvPr id="5" name="그림 4">
+            <a:extLst>
+              <a:ext uri="{FF2B5EF4-FFF2-40B4-BE49-F238E27FC236}">
+                <a16:creationId xmlns:a16="http://schemas.microsoft.com/office/drawing/2014/main" id="{FEF833CC-49FE-999C-3214-932743B3F748}"/>
+              </a:ext>
+            </a:extLst>
+          </p:cNvPr>
+          <p:cNvPicPr>
+            <a:picLocks noChangeAspect="1"/>
+          </p:cNvPicPr>
+          <p:nvPr/>
+        </p:nvPicPr>
+        <p:blipFill>
+          <a:blip r:embed="rId5"/>
+          <a:stretch>
+            <a:fillRect/>
+          </a:stretch>
+        </p:blipFill>
+        <p:spPr>
+          <a:xfrm>
+            <a:off x="2325444" y="4276110"/>
+            <a:ext cx="3058482" cy="1720396"/>
+          </a:xfrm>
+          <a:prstGeom prst="rect">
+            <a:avLst/>
+          </a:prstGeom>
+        </p:spPr>
+      </p:pic>
     </p:spTree>
     <p:extLst>
       <p:ext uri="{BB962C8B-B14F-4D97-AF65-F5344CB8AC3E}">
